--- a/Deber_6-P3 Pseudocodigo del Taller 10/Taller-10-Diseno-y-Modelado-de-Pseudocodigo-para-EduSync-AI.pptx
+++ b/Deber_6-P3 Pseudocodigo del Taller 10/Taller-10-Diseno-y-Modelado-de-Pseudocodigo-para-EduSync-AI.pptx
@@ -1290,7 +1290,18 @@
                 <a:ea typeface="Cabin" pitchFamily="34" charset="-122"/>
                 <a:cs typeface="Cabin" pitchFamily="34" charset="-120"/>
               </a:rPr>
-              <a:t> [Tu Nombre y Apellido]</a:t>
+              <a:t> Rafael </a:t>
+            </a:r>
+            <a:r>
+              <a:rPr lang="en-US" sz="1150" dirty="0" err="1">
+                <a:solidFill>
+                  <a:srgbClr val="CAD6DE"/>
+                </a:solidFill>
+                <a:latin typeface="Cabin" pitchFamily="34" charset="0"/>
+                <a:ea typeface="Cabin" pitchFamily="34" charset="-122"/>
+                <a:cs typeface="Cabin" pitchFamily="34" charset="-120"/>
+              </a:rPr>
+              <a:t>Cambera</a:t>
             </a:r>
             <a:endParaRPr lang="en-US" sz="1150" dirty="0"/>
           </a:p>
